--- a/policies/Countries_to_contact.pptx
+++ b/policies/Countries_to_contact.pptx
@@ -1800,7 +1800,7 @@
                 <a:ea typeface="Cambria" pitchFamily="34" charset="-122"/>
                 <a:cs typeface="Cambria" pitchFamily="34" charset="-120"/>
               </a:rPr>
-              <a:t>Why these five</a:t>
+              <a:t>Why these six</a:t>
             </a:r>
             <a:endParaRPr lang="en-US" sz="3200" dirty="0"/>
           </a:p>
@@ -5562,7 +5562,7 @@
                 <a:ea typeface="Calibri" pitchFamily="34" charset="-122"/>
                 <a:cs typeface="Calibri" pitchFamily="34" charset="-120"/>
               </a:rPr>
-              <a:t>Australia (Victoria), Teacher Re-Engagement Initiative</a:t>
+              <a:t>Germany (Lower Saxony), earnings ceiling and letter to retiring teachers</a:t>
             </a:r>
             <a:endParaRPr lang="en-US" sz="1250" dirty="0"/>
           </a:p>
@@ -5579,7 +5579,7 @@
                 <a:ea typeface="Calibri" pitchFamily="34" charset="-122"/>
                 <a:cs typeface="Calibri" pitchFamily="34" charset="-120"/>
               </a:rPr>
-              <a:t>Paid placements with a known budget and strong initial interest; conversion into jobs never published, and funding after mid-2025 unconfirmed. Same contact route as New South Wales.</a:t>
+              <a:t>A clean before-and-after: the ceiling was raised in 2022 and abolished in 2024, with a letter campaign in between. Pension records would show how many hours pensioners now teach.</a:t>
             </a:r>
             <a:endParaRPr lang="en-US" sz="1250" dirty="0"/>
           </a:p>
@@ -5645,7 +5645,7 @@
                 <a:ea typeface="Calibri" pitchFamily="34" charset="-122"/>
                 <a:cs typeface="Calibri" pitchFamily="34" charset="-120"/>
               </a:rPr>
-              <a:t>Germany (Lower Saxony), earnings ceiling and letter to retiring teachers</a:t>
+              <a:t>New Zealand, streamlined return with fees covered</a:t>
             </a:r>
             <a:endParaRPr lang="en-US" sz="1250" dirty="0"/>
           </a:p>
@@ -5662,7 +5662,7 @@
                 <a:ea typeface="Calibri" pitchFamily="34" charset="-122"/>
                 <a:cs typeface="Calibri" pitchFamily="34" charset="-120"/>
               </a:rPr>
-              <a:t>A clean before-and-after: the ceiling was raised in 2022 and abolished in 2024, with a letter campaign in between. Pension records would show how many hours pensioners now teach.</a:t>
+              <a:t>352 returners counted by April 2025; the Ministry monitors the pathway and could say who returns and whether they stay.</a:t>
             </a:r>
             <a:endParaRPr lang="en-US" sz="1250" dirty="0"/>
           </a:p>
@@ -5728,7 +5728,7 @@
                 <a:ea typeface="Calibri" pitchFamily="34" charset="-122"/>
                 <a:cs typeface="Calibri" pitchFamily="34" charset="-120"/>
               </a:rPr>
-              <a:t>New Zealand, streamlined return with fees covered</a:t>
+              <a:t>United States (New Mexico), Educational Retirees Returning to Work Act (2022)</a:t>
             </a:r>
             <a:endParaRPr lang="en-US" sz="1250" dirty="0"/>
           </a:p>
@@ -5745,7 +5745,7 @@
                 <a:ea typeface="Calibri" pitchFamily="34" charset="-122"/>
                 <a:cs typeface="Calibri" pitchFamily="34" charset="-120"/>
               </a:rPr>
-              <a:t>352 returners counted by April 2025; the Ministry monitors the pathway and could say who returns and whether they stay.</a:t>
+              <a:t>Every returning retiree must be approved by the Educational Retirement Board, so exact counts of applications, approvals and destinations exist; the three-year cap shows how long returners stay.</a:t>
             </a:r>
             <a:endParaRPr lang="en-US" sz="1250" dirty="0"/>
           </a:p>
@@ -5811,7 +5811,7 @@
                 <a:ea typeface="Calibri" pitchFamily="34" charset="-122"/>
                 <a:cs typeface="Calibri" pitchFamily="34" charset="-120"/>
               </a:rPr>
-              <a:t>United States (New Mexico), Educational Retirees Returning to Work Act (2022)</a:t>
+              <a:t>Singapore, Flexi-Adjunct Teaching Scheme</a:t>
             </a:r>
             <a:endParaRPr lang="en-US" sz="1250" dirty="0"/>
           </a:p>
@@ -5828,7 +5828,7 @@
                 <a:ea typeface="Calibri" pitchFamily="34" charset="-122"/>
                 <a:cs typeface="Calibri" pitchFamily="34" charset="-120"/>
               </a:rPr>
-              <a:t>Every returning retiree must be approved by the Educational Retirement Board, so exact counts of applications, approvals and destinations exist; the three-year cap shows how long returners stay.</a:t>
+              <a:t>A standing register of former teachers with published figures on how many join after leaving the service; the ministry could say how long they stay and what they do next.</a:t>
             </a:r>
             <a:endParaRPr lang="en-US" sz="1250" dirty="0"/>
           </a:p>
@@ -5836,90 +5836,7 @@
       </p:sp>
       <p:sp>
         <p:nvSpPr>
-          <p:cNvPr id="11" name="Shape 9"/>
-          <p:cNvSpPr/>
-          <p:nvPr/>
-        </p:nvSpPr>
-        <p:spPr>
-          <a:xfrm>
-            <a:off x="548640" y="5184648"/>
-            <a:ext cx="11064240" cy="896112"/>
-          </a:xfrm>
-          <a:prstGeom prst="roundRect">
-            <a:avLst>
-              <a:gd name="adj" fmla="val 10204"/>
-            </a:avLst>
-          </a:prstGeom>
-          <a:solidFill>
-            <a:srgbClr val="EAF2EE"/>
-          </a:solidFill>
-          <a:ln w="12700">
-            <a:solidFill>
-              <a:srgbClr val="EAF2EE"/>
-            </a:solidFill>
-            <a:prstDash val="solid"/>
-          </a:ln>
-        </p:spPr>
-      </p:sp>
-      <p:sp>
-        <p:nvSpPr>
-          <p:cNvPr id="12" name="Text 10"/>
-          <p:cNvSpPr txBox="1"/>
-          <p:nvPr/>
-        </p:nvSpPr>
-        <p:spPr>
-          <a:xfrm>
-            <a:off x="777240" y="5257800"/>
-            <a:ext cx="10607040" cy="749808"/>
-          </a:xfrm>
-          <a:prstGeom prst="rect">
-            <a:avLst/>
-          </a:prstGeom>
-          <a:noFill/>
-          <a:ln/>
-        </p:spPr>
-        <p:txBody>
-          <a:bodyPr wrap="square" lIns="0" tIns="0" rIns="0" bIns="0" rtlCol="0" anchor="ctr"/>
-          <a:lstStyle/>
-          <a:p>
-            <a:pPr indent="0" marL="0">
-              <a:buNone/>
-            </a:pPr>
-            <a:r>
-              <a:rPr lang="en-US" sz="1250" b="1" dirty="0">
-                <a:solidFill>
-                  <a:srgbClr val="24313A"/>
-                </a:solidFill>
-                <a:latin typeface="Calibri" pitchFamily="34" charset="0"/>
-                <a:ea typeface="Calibri" pitchFamily="34" charset="-122"/>
-                <a:cs typeface="Calibri" pitchFamily="34" charset="-120"/>
-              </a:rPr>
-              <a:t>Singapore, Flexi-Adjunct Teaching Scheme</a:t>
-            </a:r>
-            <a:endParaRPr lang="en-US" sz="1250" dirty="0"/>
-          </a:p>
-          <a:p>
-            <a:pPr indent="0" marL="0">
-              <a:buNone/>
-            </a:pPr>
-            <a:r>
-              <a:rPr lang="en-US" sz="1250" dirty="0">
-                <a:solidFill>
-                  <a:srgbClr val="24313A"/>
-                </a:solidFill>
-                <a:latin typeface="Calibri" pitchFamily="34" charset="0"/>
-                <a:ea typeface="Calibri" pitchFamily="34" charset="-122"/>
-                <a:cs typeface="Calibri" pitchFamily="34" charset="-120"/>
-              </a:rPr>
-              <a:t>A standing register of former teachers with published figures on how many join after leaving the service; the ministry could say how long they stay and what they do next.</a:t>
-            </a:r>
-            <a:endParaRPr lang="en-US" sz="1250" dirty="0"/>
-          </a:p>
-        </p:txBody>
-      </p:sp>
-      <p:sp>
-        <p:nvSpPr>
-          <p:cNvPr id="13" name="Text 11"/>
+          <p:cNvPr id="11" name="Text 9"/>
           <p:cNvSpPr txBox="1"/>
           <p:nvPr/>
         </p:nvSpPr>

--- a/policies/Countries_to_contact.pptx
+++ b/policies/Countries_to_contact.pptx
@@ -13,9 +13,10 @@
     <p:sldId id="261" r:id="rId7"/>
     <p:sldId id="262" r:id="rId8"/>
     <p:sldId id="263" r:id="rId9"/>
+    <p:sldId id="264" r:id="rId10"/>
   </p:sldIdLst>
   <p:notesMasterIdLst>
-    <p:notesMasterId r:id="rId10"/>
+    <p:notesMasterId r:id="rId11"/>
   </p:notesMasterIdLst>
   <p:sldSz cx="12192000" cy="6858000"/>
   <p:notesSz cx="6858000" cy="12192000"/>
@@ -1125,7 +1126,7 @@
           <a:p>
             <a:r>
               <a:rPr lang="en-US" dirty="0"/>
-              <a:t/>
+              <a:t>Draft questions for a first contact; sources and figures as in the main deck (slide on this policy).</a:t>
             </a:r>
             <a:endParaRPr lang="en-US" dirty="0"/>
           </a:p>
@@ -1149,6 +1150,94 @@
             <a:fld id="{F7021451-1387-4CA6-816F-3879F97B5CBC}" type="slidenum">
               <a:rPr lang="en-US"/>
               <a:t>8</a:t>
+            </a:fld>
+            <a:endParaRPr lang="en-US"/>
+          </a:p>
+        </p:txBody>
+      </p:sp>
+    </p:spTree>
+    <p:extLst>
+      <p:ext uri="{BB962C8B-B14F-4D97-AF65-F5344CB8AC3E}">
+        <p14:creationId xmlns:p14="http://schemas.microsoft.com/office/powerpoint/2010/main" val="1024086991"/>
+      </p:ext>
+    </p:extLst>
+  </p:cSld>
+  <p:clrMapOvr>
+    <a:masterClrMapping/>
+  </p:clrMapOvr>
+</p:notes>
+</file>
+
+<file path=ppt/notesSlides/notesSlide9.xml><?xml version="1.0" encoding="utf-8"?>
+<p:notes xmlns:a="http://schemas.openxmlformats.org/drawingml/2006/main" xmlns:r="http://schemas.openxmlformats.org/officeDocument/2006/relationships" xmlns:p="http://schemas.openxmlformats.org/presentationml/2006/main">
+  <p:cSld>
+    <p:spTree>
+      <p:nvGrpSpPr>
+        <p:cNvPr id="1" name=""/>
+        <p:cNvGrpSpPr/>
+        <p:nvPr/>
+      </p:nvGrpSpPr>
+      <p:grpSpPr>
+        <a:xfrm>
+          <a:off x="0" y="0"/>
+          <a:ext cx="0" cy="0"/>
+          <a:chOff x="0" y="0"/>
+          <a:chExt cx="0" cy="0"/>
+        </a:xfrm>
+      </p:grpSpPr>
+      <p:sp>
+        <p:nvSpPr>
+          <p:cNvPr id="2" name="Slide Image Placeholder 1"/>
+          <p:cNvSpPr>
+            <a:spLocks noGrp="1" noRot="1" noChangeAspect="1"/>
+          </p:cNvSpPr>
+          <p:nvPr>
+            <p:ph type="sldImg"/>
+          </p:nvPr>
+        </p:nvSpPr>
+        <p:spPr/>
+      </p:sp>
+      <p:sp>
+        <p:nvSpPr>
+          <p:cNvPr id="3" name="Notes Placeholder 2"/>
+          <p:cNvSpPr>
+            <a:spLocks noGrp="1"/>
+          </p:cNvSpPr>
+          <p:nvPr>
+            <p:ph type="body" idx="1"/>
+          </p:nvPr>
+        </p:nvSpPr>
+        <p:spPr/>
+        <p:txBody>
+          <a:bodyPr/>
+          <a:lstStyle/>
+          <a:p>
+            <a:r>
+              <a:rPr lang="en-US" dirty="0"/>
+              <a:t/>
+            </a:r>
+            <a:endParaRPr lang="en-US" dirty="0"/>
+          </a:p>
+        </p:txBody>
+      </p:sp>
+      <p:sp>
+        <p:nvSpPr>
+          <p:cNvPr id="4" name="Slide Number Placeholder 3"/>
+          <p:cNvSpPr>
+            <a:spLocks noGrp="1"/>
+          </p:cNvSpPr>
+          <p:nvPr>
+            <p:ph type="sldNum" sz="quarter" idx="10"/>
+          </p:nvPr>
+        </p:nvSpPr>
+        <p:spPr/>
+        <p:txBody>
+          <a:bodyPr/>
+          <a:lstStyle/>
+          <a:p>
+            <a:fld id="{F7021451-1387-4CA6-816F-3879F97B5CBC}" type="slidenum">
+              <a:rPr lang="en-US"/>
+              <a:t>9</a:t>
             </a:fld>
             <a:endParaRPr lang="en-US"/>
           </a:p>
@@ -1735,6 +1824,30 @@
           </a:prstGeom>
         </p:spPr>
       </p:pic>
+      <p:pic>
+        <p:nvPicPr>
+          <p:cNvPr id="10" name="Image 5" descr="preencoded.png">    </p:cNvPr>
+          <p:cNvPicPr>
+            <a:picLocks noChangeAspect="1"/>
+          </p:cNvPicPr>
+          <p:nvPr/>
+        </p:nvPicPr>
+        <p:blipFill>
+          <a:blip r:embed="rId6"/>
+          <a:stretch>
+            <a:fillRect/>
+          </a:stretch>
+        </p:blipFill>
+        <p:spPr>
+          <a:xfrm>
+            <a:off x="6446520" y="4937760"/>
+            <a:ext cx="914400" cy="685800"/>
+          </a:xfrm>
+          <a:prstGeom prst="rect">
+            <a:avLst/>
+          </a:prstGeom>
+        </p:spPr>
+      </p:pic>
     </p:spTree>
   </p:cSld>
   <p:clrMapOvr>
@@ -1853,12 +1966,12 @@
         </p:nvSpPr>
         <p:spPr>
           <a:xfrm>
-            <a:off x="548640" y="2011680"/>
-            <a:ext cx="11064240" cy="804672"/>
+            <a:off x="548640" y="1874520"/>
+            <a:ext cx="11064240" cy="749808"/>
           </a:xfrm>
           <a:prstGeom prst="roundRect">
             <a:avLst>
-              <a:gd name="adj" fmla="val 11364"/>
+              <a:gd name="adj" fmla="val 12195"/>
             </a:avLst>
           </a:prstGeom>
           <a:solidFill>
@@ -1888,8 +2001,8 @@
         </p:blipFill>
         <p:spPr>
           <a:xfrm>
-            <a:off x="777240" y="2153412"/>
-            <a:ext cx="694944" cy="521208"/>
+            <a:off x="777240" y="1993392"/>
+            <a:ext cx="676656" cy="507492"/>
           </a:xfrm>
           <a:prstGeom prst="rect">
             <a:avLst/>
@@ -1904,8 +2017,8 @@
         </p:nvSpPr>
         <p:spPr>
           <a:xfrm>
-            <a:off x="1691640" y="2066544"/>
-            <a:ext cx="9784080" cy="694944"/>
+            <a:off x="1691640" y="1911096"/>
+            <a:ext cx="9784080" cy="676656"/>
           </a:xfrm>
           <a:prstGeom prst="rect">
             <a:avLst/>
@@ -1921,7 +2034,7 @@
               <a:buNone/>
             </a:pPr>
             <a:r>
-              <a:rPr lang="en-US" sz="1150" b="1" dirty="0">
+              <a:rPr lang="en-US" sz="1100" b="1" dirty="0">
                 <a:solidFill>
                   <a:srgbClr val="24313A"/>
                 </a:solidFill>
@@ -1931,14 +2044,14 @@
               </a:rPr>
               <a:t>Australia (New South Wales): Teachers Re-Engage (since 2023)</a:t>
             </a:r>
-            <a:endParaRPr lang="en-US" sz="1150" dirty="0"/>
+            <a:endParaRPr lang="en-US" sz="1100" dirty="0"/>
           </a:p>
           <a:p>
             <a:pPr indent="0" marL="0">
               <a:buNone/>
             </a:pPr>
             <a:r>
-              <a:rPr lang="en-US" sz="1150" dirty="0">
+              <a:rPr lang="en-US" sz="1100" dirty="0">
                 <a:solidFill>
                   <a:srgbClr val="24313A"/>
                 </a:solidFill>
@@ -1948,7 +2061,7 @@
               </a:rPr>
               <a:t>It is the cleanest example of a direct-outreach nudge with a published funnel from contacts to placements, and the missing pieces (cost, retention, who came back) exist in the department's records.</a:t>
             </a:r>
-            <a:endParaRPr lang="en-US" sz="1150" dirty="0"/>
+            <a:endParaRPr lang="en-US" sz="1100" dirty="0"/>
           </a:p>
         </p:txBody>
       </p:sp>
@@ -1960,12 +2073,12 @@
         </p:nvSpPr>
         <p:spPr>
           <a:xfrm>
-            <a:off x="548640" y="2907792"/>
-            <a:ext cx="11064240" cy="804672"/>
+            <a:off x="548640" y="2697480"/>
+            <a:ext cx="11064240" cy="749808"/>
           </a:xfrm>
           <a:prstGeom prst="roundRect">
             <a:avLst>
-              <a:gd name="adj" fmla="val 11364"/>
+              <a:gd name="adj" fmla="val 12195"/>
             </a:avLst>
           </a:prstGeom>
           <a:solidFill>
@@ -1995,8 +2108,8 @@
         </p:blipFill>
         <p:spPr>
           <a:xfrm>
-            <a:off x="777240" y="3049524"/>
-            <a:ext cx="694944" cy="521208"/>
+            <a:off x="777240" y="2816352"/>
+            <a:ext cx="676656" cy="507492"/>
           </a:xfrm>
           <a:prstGeom prst="rect">
             <a:avLst/>
@@ -2011,8 +2124,8 @@
         </p:nvSpPr>
         <p:spPr>
           <a:xfrm>
-            <a:off x="1691640" y="2962656"/>
-            <a:ext cx="9784080" cy="694944"/>
+            <a:off x="1691640" y="2734056"/>
+            <a:ext cx="9784080" cy="676656"/>
           </a:xfrm>
           <a:prstGeom prst="rect">
             <a:avLst/>
@@ -2028,7 +2141,7 @@
               <a:buNone/>
             </a:pPr>
             <a:r>
-              <a:rPr lang="en-US" sz="1150" b="1" dirty="0">
+              <a:rPr lang="en-US" sz="1100" b="1" dirty="0">
                 <a:solidFill>
                   <a:srgbClr val="24313A"/>
                 </a:solidFill>
@@ -2038,14 +2151,14 @@
               </a:rPr>
               <a:t>Australia (Victoria): Teacher Re-Engagement Initiative (since 2022)</a:t>
             </a:r>
-            <a:endParaRPr lang="en-US" sz="1150" dirty="0"/>
+            <a:endParaRPr lang="en-US" sz="1100" dirty="0"/>
           </a:p>
           <a:p>
             <a:pPr indent="0" marL="0">
               <a:buNone/>
             </a:pPr>
             <a:r>
-              <a:rPr lang="en-US" sz="1150" dirty="0">
+              <a:rPr lang="en-US" sz="1100" dirty="0">
                 <a:solidFill>
                   <a:srgbClr val="24313A"/>
                 </a:solidFill>
@@ -2055,7 +2168,7 @@
               </a:rPr>
               <a:t>It is the clearest case we have found of paying former teachers to try the classroom again before they commit, with a known budget and strong early interest. What happened after the placements has never been published.</a:t>
             </a:r>
-            <a:endParaRPr lang="en-US" sz="1150" dirty="0"/>
+            <a:endParaRPr lang="en-US" sz="1100" dirty="0"/>
           </a:p>
         </p:txBody>
       </p:sp>
@@ -2067,12 +2180,12 @@
         </p:nvSpPr>
         <p:spPr>
           <a:xfrm>
-            <a:off x="548640" y="3803904"/>
-            <a:ext cx="11064240" cy="804672"/>
+            <a:off x="548640" y="3520440"/>
+            <a:ext cx="11064240" cy="749808"/>
           </a:xfrm>
           <a:prstGeom prst="roundRect">
             <a:avLst>
-              <a:gd name="adj" fmla="val 11364"/>
+              <a:gd name="adj" fmla="val 12195"/>
             </a:avLst>
           </a:prstGeom>
           <a:solidFill>
@@ -2102,8 +2215,8 @@
         </p:blipFill>
         <p:spPr>
           <a:xfrm>
-            <a:off x="777240" y="3945636"/>
-            <a:ext cx="694944" cy="521208"/>
+            <a:off x="777240" y="3639312"/>
+            <a:ext cx="676656" cy="507492"/>
           </a:xfrm>
           <a:prstGeom prst="rect">
             <a:avLst/>
@@ -2118,8 +2231,8 @@
         </p:nvSpPr>
         <p:spPr>
           <a:xfrm>
-            <a:off x="1691640" y="3858768"/>
-            <a:ext cx="9784080" cy="694944"/>
+            <a:off x="1691640" y="3557016"/>
+            <a:ext cx="9784080" cy="676656"/>
           </a:xfrm>
           <a:prstGeom prst="rect">
             <a:avLst/>
@@ -2135,7 +2248,7 @@
               <a:buNone/>
             </a:pPr>
             <a:r>
-              <a:rPr lang="en-US" sz="1150" b="1" dirty="0">
+              <a:rPr lang="en-US" sz="1100" b="1" dirty="0">
                 <a:solidFill>
                   <a:srgbClr val="24313A"/>
                 </a:solidFill>
@@ -2145,14 +2258,14 @@
               </a:rPr>
               <a:t>Netherlands: Grant to primary schools for re-hiring former teachers (2017–2020)</a:t>
             </a:r>
-            <a:endParaRPr lang="en-US" sz="1150" dirty="0"/>
+            <a:endParaRPr lang="en-US" sz="1100" dirty="0"/>
           </a:p>
           <a:p>
             <a:pPr indent="0" marL="0">
               <a:buNone/>
             </a:pPr>
             <a:r>
-              <a:rPr lang="en-US" sz="1150" dirty="0">
+              <a:rPr lang="en-US" sz="1100" dirty="0">
                 <a:solidFill>
                   <a:srgbClr val="24313A"/>
                 </a:solidFill>
@@ -2162,7 +2275,7 @@
               </a:rPr>
               <a:t>It is the only measure in our set that pays the school rather than the teacher, it is closed, so the whole story can be told, and the Netherlands has the best data on the pool of qualified teachers working outside education.</a:t>
             </a:r>
-            <a:endParaRPr lang="en-US" sz="1150" dirty="0"/>
+            <a:endParaRPr lang="en-US" sz="1100" dirty="0"/>
           </a:p>
         </p:txBody>
       </p:sp>
@@ -2174,12 +2287,12 @@
         </p:nvSpPr>
         <p:spPr>
           <a:xfrm>
-            <a:off x="548640" y="4700016"/>
-            <a:ext cx="11064240" cy="804672"/>
+            <a:off x="548640" y="4343400"/>
+            <a:ext cx="11064240" cy="749808"/>
           </a:xfrm>
           <a:prstGeom prst="roundRect">
             <a:avLst>
-              <a:gd name="adj" fmla="val 11364"/>
+              <a:gd name="adj" fmla="val 12195"/>
             </a:avLst>
           </a:prstGeom>
           <a:solidFill>
@@ -2209,8 +2322,8 @@
         </p:blipFill>
         <p:spPr>
           <a:xfrm>
-            <a:off x="777240" y="4841748"/>
-            <a:ext cx="694944" cy="521208"/>
+            <a:off x="777240" y="4462272"/>
+            <a:ext cx="676656" cy="507492"/>
           </a:xfrm>
           <a:prstGeom prst="rect">
             <a:avLst/>
@@ -2225,8 +2338,8 @@
         </p:nvSpPr>
         <p:spPr>
           <a:xfrm>
-            <a:off x="1691640" y="4754880"/>
-            <a:ext cx="9784080" cy="694944"/>
+            <a:off x="1691640" y="4379976"/>
+            <a:ext cx="9784080" cy="676656"/>
           </a:xfrm>
           <a:prstGeom prst="rect">
             <a:avLst/>
@@ -2242,34 +2355,34 @@
               <a:buNone/>
             </a:pPr>
             <a:r>
-              <a:rPr lang="en-US" sz="1150" b="1" dirty="0">
-                <a:solidFill>
-                  <a:srgbClr val="24313A"/>
-                </a:solidFill>
-                <a:latin typeface="Calibri" pitchFamily="34" charset="0"/>
-                <a:ea typeface="Calibri" pitchFamily="34" charset="-122"/>
-                <a:cs typeface="Calibri" pitchFamily="34" charset="-120"/>
-              </a:rPr>
-              <a:t>United States (Michigan): Public Act 147 of 2023: shorter wait and no earnings cap for retirees who return</a:t>
-            </a:r>
-            <a:endParaRPr lang="en-US" sz="1150" dirty="0"/>
+              <a:rPr lang="en-US" sz="1100" b="1" dirty="0">
+                <a:solidFill>
+                  <a:srgbClr val="24313A"/>
+                </a:solidFill>
+                <a:latin typeface="Calibri" pitchFamily="34" charset="0"/>
+                <a:ea typeface="Calibri" pitchFamily="34" charset="-122"/>
+                <a:cs typeface="Calibri" pitchFamily="34" charset="-120"/>
+              </a:rPr>
+              <a:t>Canada (Quebec): Measure 15178: pay at the pre-retirement step (2020, permanent)</a:t>
+            </a:r>
+            <a:endParaRPr lang="en-US" sz="1100" dirty="0"/>
           </a:p>
           <a:p>
             <a:pPr indent="0" marL="0">
               <a:buNone/>
             </a:pPr>
             <a:r>
-              <a:rPr lang="en-US" sz="1150" dirty="0">
-                <a:solidFill>
-                  <a:srgbClr val="24313A"/>
-                </a:solidFill>
-                <a:latin typeface="Calibri" pitchFamily="34" charset="0"/>
-                <a:ea typeface="Calibri" pitchFamily="34" charset="-122"/>
-                <a:cs typeface="Calibri" pitchFamily="34" charset="-120"/>
-              </a:rPr>
-              <a:t>A clean before-and-after in a single state, with every rehired retiree recorded by the state pension office, and a 2028 expiry that forces the state to decide, and probably to measure, whether it worked.</a:t>
-            </a:r>
-            <a:endParaRPr lang="en-US" sz="1150" dirty="0"/>
+              <a:rPr lang="en-US" sz="1100" dirty="0">
+                <a:solidFill>
+                  <a:srgbClr val="24313A"/>
+                </a:solidFill>
+                <a:latin typeface="Calibri" pitchFamily="34" charset="0"/>
+                <a:ea typeface="Calibri" pitchFamily="34" charset="-122"/>
+                <a:cs typeface="Calibri" pitchFamily="34" charset="-120"/>
+              </a:rPr>
+              <a:t>The only case in our set where the instrument sits in the budget rules for school boards rather than in a programme with its own staff, and one of the few kept once the emergency that prompted it had passed.</a:t>
+            </a:r>
+            <a:endParaRPr lang="en-US" sz="1100" dirty="0"/>
           </a:p>
         </p:txBody>
       </p:sp>
@@ -2281,12 +2394,12 @@
         </p:nvSpPr>
         <p:spPr>
           <a:xfrm>
-            <a:off x="548640" y="5596128"/>
-            <a:ext cx="11064240" cy="804672"/>
+            <a:off x="548640" y="5166360"/>
+            <a:ext cx="11064240" cy="749808"/>
           </a:xfrm>
           <a:prstGeom prst="roundRect">
             <a:avLst>
-              <a:gd name="adj" fmla="val 11364"/>
+              <a:gd name="adj" fmla="val 12195"/>
             </a:avLst>
           </a:prstGeom>
           <a:solidFill>
@@ -2316,8 +2429,8 @@
         </p:blipFill>
         <p:spPr>
           <a:xfrm>
-            <a:off x="777240" y="5737860"/>
-            <a:ext cx="694944" cy="521208"/>
+            <a:off x="777240" y="5285232"/>
+            <a:ext cx="676656" cy="507492"/>
           </a:xfrm>
           <a:prstGeom prst="rect">
             <a:avLst/>
@@ -2332,8 +2445,8 @@
         </p:nvSpPr>
         <p:spPr>
           <a:xfrm>
-            <a:off x="1691640" y="5650992"/>
-            <a:ext cx="9784080" cy="694944"/>
+            <a:off x="1691640" y="5202936"/>
+            <a:ext cx="9784080" cy="676656"/>
           </a:xfrm>
           <a:prstGeom prst="rect">
             <a:avLst/>
@@ -2349,24 +2462,131 @@
               <a:buNone/>
             </a:pPr>
             <a:r>
-              <a:rPr lang="en-US" sz="1150" b="1" dirty="0">
-                <a:solidFill>
-                  <a:srgbClr val="24313A"/>
-                </a:solidFill>
-                <a:latin typeface="Calibri" pitchFamily="34" charset="0"/>
-                <a:ea typeface="Calibri" pitchFamily="34" charset="-122"/>
-                <a:cs typeface="Calibri" pitchFamily="34" charset="-120"/>
-              </a:rPr>
-              <a:t>Portugal: Hiring retired teachers for shortage posts (since 2024/25)</a:t>
-            </a:r>
-            <a:endParaRPr lang="en-US" sz="1150" dirty="0"/>
+              <a:rPr lang="en-US" sz="1100" b="1" dirty="0">
+                <a:solidFill>
+                  <a:srgbClr val="24313A"/>
+                </a:solidFill>
+                <a:latin typeface="Calibri" pitchFamily="34" charset="0"/>
+                <a:ea typeface="Calibri" pitchFamily="34" charset="-122"/>
+                <a:cs typeface="Calibri" pitchFamily="34" charset="-120"/>
+              </a:rPr>
+              <a:t>United States (Michigan): Public Act 147 of 2023: shorter wait, no earnings cap (to 2028)</a:t>
+            </a:r>
+            <a:endParaRPr lang="en-US" sz="1100" dirty="0"/>
           </a:p>
           <a:p>
             <a:pPr indent="0" marL="0">
               <a:buNone/>
             </a:pPr>
             <a:r>
-              <a:rPr lang="en-US" sz="1150" dirty="0">
+              <a:rPr lang="en-US" sz="1100" dirty="0">
+                <a:solidFill>
+                  <a:srgbClr val="24313A"/>
+                </a:solidFill>
+                <a:latin typeface="Calibri" pitchFamily="34" charset="0"/>
+                <a:ea typeface="Calibri" pitchFamily="34" charset="-122"/>
+                <a:cs typeface="Calibri" pitchFamily="34" charset="-120"/>
+              </a:rPr>
+              <a:t>A clean before-and-after in a single state, with every rehired retiree recorded by the state pension office, and a 2028 expiry that forces the state to decide, and probably to measure, whether it worked.</a:t>
+            </a:r>
+            <a:endParaRPr lang="en-US" sz="1100" dirty="0"/>
+          </a:p>
+        </p:txBody>
+      </p:sp>
+      <p:sp>
+        <p:nvSpPr>
+          <p:cNvPr id="19" name="Shape 12"/>
+          <p:cNvSpPr/>
+          <p:nvPr/>
+        </p:nvSpPr>
+        <p:spPr>
+          <a:xfrm>
+            <a:off x="548640" y="5989320"/>
+            <a:ext cx="11064240" cy="749808"/>
+          </a:xfrm>
+          <a:prstGeom prst="roundRect">
+            <a:avLst>
+              <a:gd name="adj" fmla="val 12195"/>
+            </a:avLst>
+          </a:prstGeom>
+          <a:solidFill>
+            <a:srgbClr val="EAF2EE"/>
+          </a:solidFill>
+          <a:ln w="12700">
+            <a:solidFill>
+              <a:srgbClr val="EAF2EE"/>
+            </a:solidFill>
+            <a:prstDash val="solid"/>
+          </a:ln>
+        </p:spPr>
+      </p:sp>
+      <p:pic>
+        <p:nvPicPr>
+          <p:cNvPr id="20" name="Image 5" descr="preencoded.png">    </p:cNvPr>
+          <p:cNvPicPr>
+            <a:picLocks noChangeAspect="1"/>
+          </p:cNvPicPr>
+          <p:nvPr/>
+        </p:nvPicPr>
+        <p:blipFill>
+          <a:blip r:embed="rId6"/>
+          <a:stretch>
+            <a:fillRect/>
+          </a:stretch>
+        </p:blipFill>
+        <p:spPr>
+          <a:xfrm>
+            <a:off x="777240" y="6108192"/>
+            <a:ext cx="676656" cy="507492"/>
+          </a:xfrm>
+          <a:prstGeom prst="rect">
+            <a:avLst/>
+          </a:prstGeom>
+        </p:spPr>
+      </p:pic>
+      <p:sp>
+        <p:nvSpPr>
+          <p:cNvPr id="21" name="Text 13"/>
+          <p:cNvSpPr txBox="1"/>
+          <p:nvPr/>
+        </p:nvSpPr>
+        <p:spPr>
+          <a:xfrm>
+            <a:off x="1691640" y="6025896"/>
+            <a:ext cx="9784080" cy="676656"/>
+          </a:xfrm>
+          <a:prstGeom prst="rect">
+            <a:avLst/>
+          </a:prstGeom>
+          <a:noFill/>
+          <a:ln/>
+        </p:spPr>
+        <p:txBody>
+          <a:bodyPr wrap="square" lIns="0" tIns="0" rIns="0" bIns="0" rtlCol="0" anchor="ctr"/>
+          <a:lstStyle/>
+          <a:p>
+            <a:pPr indent="0" marL="0">
+              <a:buNone/>
+            </a:pPr>
+            <a:r>
+              <a:rPr lang="en-US" sz="1100" b="1" dirty="0">
+                <a:solidFill>
+                  <a:srgbClr val="24313A"/>
+                </a:solidFill>
+                <a:latin typeface="Calibri" pitchFamily="34" charset="0"/>
+                <a:ea typeface="Calibri" pitchFamily="34" charset="-122"/>
+                <a:cs typeface="Calibri" pitchFamily="34" charset="-120"/>
+              </a:rPr>
+              <a:t>Portugal: Decree-Law 51/2024: retired teachers in shortage posts (2024/25)</a:t>
+            </a:r>
+            <a:endParaRPr lang="en-US" sz="1100" dirty="0"/>
+          </a:p>
+          <a:p>
+            <a:pPr indent="0" marL="0">
+              <a:buNone/>
+            </a:pPr>
+            <a:r>
+              <a:rPr lang="en-US" sz="1100" dirty="0">
                 <a:solidFill>
                   <a:srgbClr val="24313A"/>
                 </a:solidFill>
@@ -2376,13 +2596,13 @@
               </a:rPr>
               <a:t>On paper the offer is generous, a full pension and a supplement on top, and yet fewer than a third of the posts were filled in the first round. It is the case most likely to tell us why retired teachers say no, and because the ministry ran a formal application process the answers exist in its own records.</a:t>
             </a:r>
-            <a:endParaRPr lang="en-US" sz="1150" dirty="0"/>
-          </a:p>
-        </p:txBody>
-      </p:sp>
-      <p:sp>
-        <p:nvSpPr>
-          <p:cNvPr id="19" name="Text 12"/>
+            <a:endParaRPr lang="en-US" sz="1100" dirty="0"/>
+          </a:p>
+        </p:txBody>
+      </p:sp>
+      <p:sp>
+        <p:nvSpPr>
+          <p:cNvPr id="22" name="Text 14"/>
           <p:cNvSpPr txBox="1"/>
           <p:nvPr/>
         </p:nvSpPr>
@@ -2688,8 +2908,8 @@
         </p:nvSpPr>
         <p:spPr>
           <a:xfrm>
-            <a:off x="548640" y="1417320"/>
-            <a:ext cx="4846320" cy="822960"/>
+            <a:off x="548640" y="1389888"/>
+            <a:ext cx="4846320" cy="960120"/>
           </a:xfrm>
           <a:prstGeom prst="rect">
             <a:avLst/>
@@ -2705,7 +2925,7 @@
               <a:buNone/>
             </a:pPr>
             <a:r>
-              <a:rPr lang="en-US" sz="2000" b="1" dirty="0">
+              <a:rPr lang="en-US" sz="1850" b="1" dirty="0">
                 <a:solidFill>
                   <a:srgbClr val="24313A"/>
                 </a:solidFill>
@@ -2715,7 +2935,7 @@
               </a:rPr>
               <a:t>Teachers Re-Engage (since 2023)</a:t>
             </a:r>
-            <a:endParaRPr lang="en-US" sz="2000" dirty="0"/>
+            <a:endParaRPr lang="en-US" sz="1850" dirty="0"/>
           </a:p>
         </p:txBody>
       </p:sp>
@@ -2727,8 +2947,8 @@
         </p:nvSpPr>
         <p:spPr>
           <a:xfrm>
-            <a:off x="548640" y="2286000"/>
-            <a:ext cx="4846320" cy="2103120"/>
+            <a:off x="548640" y="2432304"/>
+            <a:ext cx="4846320" cy="1874520"/>
           </a:xfrm>
           <a:prstGeom prst="rect">
             <a:avLst/>
@@ -3306,8 +3526,8 @@
         </p:nvSpPr>
         <p:spPr>
           <a:xfrm>
-            <a:off x="548640" y="1417320"/>
-            <a:ext cx="4846320" cy="822960"/>
+            <a:off x="548640" y="1389888"/>
+            <a:ext cx="4846320" cy="960120"/>
           </a:xfrm>
           <a:prstGeom prst="rect">
             <a:avLst/>
@@ -3323,7 +3543,7 @@
               <a:buNone/>
             </a:pPr>
             <a:r>
-              <a:rPr lang="en-US" sz="2000" b="1" dirty="0">
+              <a:rPr lang="en-US" sz="1850" b="1" dirty="0">
                 <a:solidFill>
                   <a:srgbClr val="24313A"/>
                 </a:solidFill>
@@ -3333,7 +3553,7 @@
               </a:rPr>
               <a:t>Teacher Re-Engagement Initiative (since 2022)</a:t>
             </a:r>
-            <a:endParaRPr lang="en-US" sz="2000" dirty="0"/>
+            <a:endParaRPr lang="en-US" sz="1850" dirty="0"/>
           </a:p>
         </p:txBody>
       </p:sp>
@@ -3345,8 +3565,8 @@
         </p:nvSpPr>
         <p:spPr>
           <a:xfrm>
-            <a:off x="548640" y="2286000"/>
-            <a:ext cx="4846320" cy="2103120"/>
+            <a:off x="548640" y="2432304"/>
+            <a:ext cx="4846320" cy="1874520"/>
           </a:xfrm>
           <a:prstGeom prst="rect">
             <a:avLst/>
@@ -3885,8 +4105,8 @@
         </p:nvSpPr>
         <p:spPr>
           <a:xfrm>
-            <a:off x="548640" y="1417320"/>
-            <a:ext cx="4846320" cy="822960"/>
+            <a:off x="548640" y="1389888"/>
+            <a:ext cx="4846320" cy="960120"/>
           </a:xfrm>
           <a:prstGeom prst="rect">
             <a:avLst/>
@@ -3902,7 +4122,7 @@
               <a:buNone/>
             </a:pPr>
             <a:r>
-              <a:rPr lang="en-US" sz="2000" b="1" dirty="0">
+              <a:rPr lang="en-US" sz="1850" b="1" dirty="0">
                 <a:solidFill>
                   <a:srgbClr val="24313A"/>
                 </a:solidFill>
@@ -3912,7 +4132,7 @@
               </a:rPr>
               <a:t>Grant to primary schools for re-hiring former teachers (2017–2020)</a:t>
             </a:r>
-            <a:endParaRPr lang="en-US" sz="2000" dirty="0"/>
+            <a:endParaRPr lang="en-US" sz="1850" dirty="0"/>
           </a:p>
         </p:txBody>
       </p:sp>
@@ -3924,8 +4144,8 @@
         </p:nvSpPr>
         <p:spPr>
           <a:xfrm>
-            <a:off x="548640" y="2286000"/>
-            <a:ext cx="4846320" cy="2103120"/>
+            <a:off x="548640" y="2432304"/>
+            <a:ext cx="4846320" cy="1874520"/>
           </a:xfrm>
           <a:prstGeom prst="rect">
             <a:avLst/>
@@ -4345,7 +4565,7 @@
                 <a:ea typeface="Calibri" pitchFamily="34" charset="-122"/>
                 <a:cs typeface="Calibri" pitchFamily="34" charset="-120"/>
               </a:rPr>
-              <a:t>United States</a:t>
+              <a:t>Canada</a:t>
             </a:r>
             <a:endParaRPr lang="en-US" sz="2200" dirty="0"/>
           </a:p>
@@ -4384,7 +4604,7 @@
                 <a:ea typeface="Calibri" pitchFamily="34" charset="-122"/>
                 <a:cs typeface="Calibri" pitchFamily="34" charset="-120"/>
               </a:rPr>
-              <a:t>Michigan</a:t>
+              <a:t>Quebec</a:t>
             </a:r>
             <a:endParaRPr lang="en-US" sz="1300" dirty="0"/>
           </a:p>
@@ -4503,8 +4723,8 @@
         </p:nvSpPr>
         <p:spPr>
           <a:xfrm>
-            <a:off x="548640" y="1417320"/>
-            <a:ext cx="4846320" cy="822960"/>
+            <a:off x="548640" y="1389888"/>
+            <a:ext cx="4846320" cy="960120"/>
           </a:xfrm>
           <a:prstGeom prst="rect">
             <a:avLst/>
@@ -4520,7 +4740,7 @@
               <a:buNone/>
             </a:pPr>
             <a:r>
-              <a:rPr lang="en-US" sz="2000" b="1" dirty="0">
+              <a:rPr lang="en-US" sz="1850" b="1" dirty="0">
                 <a:solidFill>
                   <a:srgbClr val="24313A"/>
                 </a:solidFill>
@@ -4528,9 +4748,9 @@
                 <a:ea typeface="Cambria" pitchFamily="34" charset="-122"/>
                 <a:cs typeface="Cambria" pitchFamily="34" charset="-120"/>
               </a:rPr>
-              <a:t>Public Act 147 of 2023: shorter wait and no earnings cap for retirees who return</a:t>
-            </a:r>
-            <a:endParaRPr lang="en-US" sz="2000" dirty="0"/>
+              <a:t>Measure 15178: pay at the pre-retirement step (2020, permanent)</a:t>
+            </a:r>
+            <a:endParaRPr lang="en-US" sz="1850" dirty="0"/>
           </a:p>
         </p:txBody>
       </p:sp>
@@ -4542,8 +4762,8 @@
         </p:nvSpPr>
         <p:spPr>
           <a:xfrm>
-            <a:off x="548640" y="2286000"/>
-            <a:ext cx="4846320" cy="2103120"/>
+            <a:off x="548640" y="2432304"/>
+            <a:ext cx="4846320" cy="1874520"/>
           </a:xfrm>
           <a:prstGeom prst="rect">
             <a:avLst/>
@@ -4570,7 +4790,7 @@
                 <a:ea typeface="Calibri" pitchFamily="34" charset="-122"/>
                 <a:cs typeface="Calibri" pitchFamily="34" charset="-120"/>
               </a:rPr>
-              <a:t>Retired school staff can be rehired sooner and earn without limit. The waiting period after retirement fell from nine months to six; during the wait a retiree may work if earnings stay under a ceiling, and afterwards there is no earnings cap and no penalty on the pension. Passed in response to shortages, the change expires in 2028.</a:t>
+              <a:t>A pay rule inside the operating budget rules the ministry sets each year for the school service centres. A retired teacher who takes supply work is paid from the first day at the salary step and experience held at retirement, where the ordinary rules grant that step only from the twentieth day, and the pension keeps running in full. Announced in September 2020, opened by ministerial order to teachers who had retired earlier, and later made permanent.</a:t>
             </a:r>
             <a:endParaRPr lang="en-US" sz="1400" dirty="0"/>
           </a:p>
@@ -4623,7 +4843,7 @@
                 <a:ea typeface="Calibri" pitchFamily="34" charset="-122"/>
                 <a:cs typeface="Calibri" pitchFamily="34" charset="-120"/>
               </a:rPr>
-              <a:t>Michigan Office of Retirement Services, which administers the school employees' retirement system, and the Michigan Department of Education's educator workforce office.</a:t>
+              <a:t>Ministere de l'Education du Quebec, direction responsible for teaching staff and for the budget rules of the centres de services scolaires.</a:t>
             </a:r>
             <a:endParaRPr lang="en-US" sz="1250" dirty="0"/>
           </a:p>
@@ -4735,7 +4955,7 @@
                 <a:ea typeface="Calibri" pitchFamily="34" charset="-122"/>
                 <a:cs typeface="Calibri" pitchFamily="34" charset="-120"/>
               </a:rPr>
-              <a:t>What was the reasoning behind loosening the rules for retirees, and how did the pension side and the schools side see it?</a:t>
+              <a:t>Why was a pay rule chosen over other ways of bringing retired teachers back?</a:t>
             </a:r>
             <a:endParaRPr lang="en-US" sz="1450" dirty="0"/>
           </a:p>
@@ -4759,7 +4979,7 @@
                 <a:ea typeface="Calibri" pitchFamily="34" charset="-122"/>
                 <a:cs typeface="Calibri" pitchFamily="34" charset="-120"/>
               </a:rPr>
-              <a:t>How have schools and retirees actually used the new rules since they came in?</a:t>
+              <a:t>How was it settled with the parties to teachers' working conditions and with the pension side?</a:t>
             </a:r>
             <a:endParaRPr lang="en-US" sz="1450" dirty="0"/>
           </a:p>
@@ -4783,7 +5003,7 @@
                 <a:ea typeface="Calibri" pitchFamily="34" charset="-122"/>
                 <a:cs typeface="Calibri" pitchFamily="34" charset="-120"/>
               </a:rPr>
-              <a:t>Have you seen any unintended effects, on retirement decisions, on younger teachers or on the pension system?</a:t>
+              <a:t>Which retired teachers came back, and for what kind of work?</a:t>
             </a:r>
             <a:endParaRPr lang="en-US" sz="1450" dirty="0"/>
           </a:p>
@@ -4807,7 +5027,7 @@
                 <a:ea typeface="Calibri" pitchFamily="34" charset="-122"/>
                 <a:cs typeface="Calibri" pitchFamily="34" charset="-120"/>
               </a:rPr>
-              <a:t>What will decide whether the rules are kept when they expire, and what would you want to know before then?</a:t>
+              <a:t>Has the measure changed the way schools cover absences, and has it been assessed?</a:t>
             </a:r>
             <a:endParaRPr lang="en-US" sz="1450" dirty="0"/>
           </a:p>
@@ -4963,7 +5183,7 @@
                 <a:ea typeface="Calibri" pitchFamily="34" charset="-122"/>
                 <a:cs typeface="Calibri" pitchFamily="34" charset="-120"/>
               </a:rPr>
-              <a:t>Portugal</a:t>
+              <a:t>United States</a:t>
             </a:r>
             <a:endParaRPr lang="en-US" sz="2200" dirty="0"/>
           </a:p>
@@ -4971,7 +5191,46 @@
       </p:sp>
       <p:sp>
         <p:nvSpPr>
-          <p:cNvPr id="5" name="Shape 2"/>
+          <p:cNvPr id="5" name="Text 2"/>
+          <p:cNvSpPr txBox="1"/>
+          <p:nvPr/>
+        </p:nvSpPr>
+        <p:spPr>
+          <a:xfrm>
+            <a:off x="1691640" y="822960"/>
+            <a:ext cx="5943600" cy="310896"/>
+          </a:xfrm>
+          <a:prstGeom prst="rect">
+            <a:avLst/>
+          </a:prstGeom>
+          <a:noFill/>
+          <a:ln/>
+        </p:spPr>
+        <p:txBody>
+          <a:bodyPr wrap="square" lIns="0" tIns="0" rIns="0" bIns="0" rtlCol="0" anchor="ctr"/>
+          <a:lstStyle/>
+          <a:p>
+            <a:pPr indent="0" marL="0">
+              <a:buNone/>
+            </a:pPr>
+            <a:r>
+              <a:rPr lang="en-US" sz="1300" dirty="0">
+                <a:solidFill>
+                  <a:srgbClr val="24313A"/>
+                </a:solidFill>
+                <a:latin typeface="Calibri" pitchFamily="34" charset="0"/>
+                <a:ea typeface="Calibri" pitchFamily="34" charset="-122"/>
+                <a:cs typeface="Calibri" pitchFamily="34" charset="-120"/>
+              </a:rPr>
+              <a:t>Michigan</a:t>
+            </a:r>
+            <a:endParaRPr lang="en-US" sz="1300" dirty="0"/>
+          </a:p>
+        </p:txBody>
+      </p:sp>
+      <p:sp>
+        <p:nvSpPr>
+          <p:cNvPr id="6" name="Shape 3"/>
           <p:cNvSpPr/>
           <p:nvPr/>
         </p:nvSpPr>
@@ -4998,7 +5257,7 @@
       </p:sp>
       <p:sp>
         <p:nvSpPr>
-          <p:cNvPr id="6" name="Text 3"/>
+          <p:cNvPr id="7" name="Text 4"/>
           <p:cNvSpPr txBox="1"/>
           <p:nvPr/>
         </p:nvSpPr>
@@ -5037,7 +5296,7 @@
       </p:sp>
       <p:sp>
         <p:nvSpPr>
-          <p:cNvPr id="7" name="Text 4"/>
+          <p:cNvPr id="8" name="Text 5"/>
           <p:cNvSpPr txBox="1"/>
           <p:nvPr/>
         </p:nvSpPr>
@@ -5076,14 +5335,14 @@
       </p:sp>
       <p:sp>
         <p:nvSpPr>
-          <p:cNvPr id="8" name="Text 5"/>
-          <p:cNvSpPr txBox="1"/>
-          <p:nvPr/>
-        </p:nvSpPr>
-        <p:spPr>
-          <a:xfrm>
-            <a:off x="548640" y="1417320"/>
-            <a:ext cx="4846320" cy="822960"/>
+          <p:cNvPr id="9" name="Text 6"/>
+          <p:cNvSpPr txBox="1"/>
+          <p:nvPr/>
+        </p:nvSpPr>
+        <p:spPr>
+          <a:xfrm>
+            <a:off x="548640" y="1389888"/>
+            <a:ext cx="4846320" cy="960120"/>
           </a:xfrm>
           <a:prstGeom prst="rect">
             <a:avLst/>
@@ -5099,7 +5358,7 @@
               <a:buNone/>
             </a:pPr>
             <a:r>
-              <a:rPr lang="en-US" sz="2000" b="1" dirty="0">
+              <a:rPr lang="en-US" sz="1850" b="1" dirty="0">
                 <a:solidFill>
                   <a:srgbClr val="24313A"/>
                 </a:solidFill>
@@ -5107,22 +5366,22 @@
                 <a:ea typeface="Cambria" pitchFamily="34" charset="-122"/>
                 <a:cs typeface="Cambria" pitchFamily="34" charset="-120"/>
               </a:rPr>
-              <a:t>Hiring retired teachers for shortage posts (since 2024/25)</a:t>
-            </a:r>
-            <a:endParaRPr lang="en-US" sz="2000" dirty="0"/>
-          </a:p>
-        </p:txBody>
-      </p:sp>
-      <p:sp>
-        <p:nvSpPr>
-          <p:cNvPr id="9" name="Text 6"/>
-          <p:cNvSpPr txBox="1"/>
-          <p:nvPr/>
-        </p:nvSpPr>
-        <p:spPr>
-          <a:xfrm>
-            <a:off x="548640" y="2286000"/>
-            <a:ext cx="4846320" cy="2103120"/>
+              <a:t>Public Act 147 of 2023: shorter wait, no earnings cap (to 2028)</a:t>
+            </a:r>
+            <a:endParaRPr lang="en-US" sz="1850" dirty="0"/>
+          </a:p>
+        </p:txBody>
+      </p:sp>
+      <p:sp>
+        <p:nvSpPr>
+          <p:cNvPr id="10" name="Text 7"/>
+          <p:cNvSpPr txBox="1"/>
+          <p:nvPr/>
+        </p:nvSpPr>
+        <p:spPr>
+          <a:xfrm>
+            <a:off x="548640" y="2432304"/>
+            <a:ext cx="4846320" cy="1874520"/>
           </a:xfrm>
           <a:prstGeom prst="rect">
             <a:avLst/>
@@ -5149,7 +5408,7 @@
                 <a:ea typeface="Calibri" pitchFamily="34" charset="-122"/>
                 <a:cs typeface="Calibri" pitchFamily="34" charset="-120"/>
               </a:rPr>
-              <a:t>Schools with an unfilled post in a shortage subject, or officially classed as under-staffed, may sign a fixed-term contract with a teacher who retired five years ago or less. The school applies through an online form and the ministry authorises the contract within a yearly quota agreed with the finance ministry. Returners keep the full pension and receive an extra payment tied to the first step of the salary scale, in proportion to the hours they teach.</a:t>
+              <a:t>Retired school staff can be rehired sooner and earn without limit. The waiting period after retirement fell from nine months to six; during the wait a retiree may work if earnings stay under a ceiling, and afterwards there is no earnings cap and no penalty on the pension. Passed in response to shortages, the change expires in 2028.</a:t>
             </a:r>
             <a:endParaRPr lang="en-US" sz="1400" dirty="0"/>
           </a:p>
@@ -5157,7 +5416,7 @@
       </p:sp>
       <p:sp>
         <p:nvSpPr>
-          <p:cNvPr id="10" name="Text 7"/>
+          <p:cNvPr id="11" name="Text 8"/>
           <p:cNvSpPr txBox="1"/>
           <p:nvPr/>
         </p:nvSpPr>
@@ -5202,7 +5461,7 @@
                 <a:ea typeface="Calibri" pitchFamily="34" charset="-122"/>
                 <a:cs typeface="Calibri" pitchFamily="34" charset="-120"/>
               </a:rPr>
-              <a:t>Portuguese Ministry of Education, Directorate-General for School Administration, teacher recruitment.</a:t>
+              <a:t>Michigan Office of Retirement Services, which administers the school employees' retirement system, and the Michigan Department of Education's educator workforce office.</a:t>
             </a:r>
             <a:endParaRPr lang="en-US" sz="1250" dirty="0"/>
           </a:p>
@@ -5210,7 +5469,7 @@
       </p:sp>
       <p:sp>
         <p:nvSpPr>
-          <p:cNvPr id="11" name="Shape 8"/>
+          <p:cNvPr id="12" name="Shape 9"/>
           <p:cNvSpPr/>
           <p:nvPr/>
         </p:nvSpPr>
@@ -5237,7 +5496,7 @@
       </p:sp>
       <p:sp>
         <p:nvSpPr>
-          <p:cNvPr id="12" name="Text 9"/>
+          <p:cNvPr id="13" name="Text 10"/>
           <p:cNvSpPr txBox="1"/>
           <p:nvPr/>
         </p:nvSpPr>
@@ -5276,7 +5535,7 @@
       </p:sp>
       <p:sp>
         <p:nvSpPr>
-          <p:cNvPr id="13" name="Text 10"/>
+          <p:cNvPr id="14" name="Text 11"/>
           <p:cNvSpPr txBox="1"/>
           <p:nvPr/>
         </p:nvSpPr>
@@ -5314,7 +5573,7 @@
                 <a:ea typeface="Calibri" pitchFamily="34" charset="-122"/>
                 <a:cs typeface="Calibri" pitchFamily="34" charset="-120"/>
               </a:rPr>
-              <a:t>What led the ministry to open these posts to retired teachers, and how was the quota agreed with the finance ministry?</a:t>
+              <a:t>What was the reasoning behind loosening the rules for retirees, and how did the pension side and the schools side see it?</a:t>
             </a:r>
             <a:endParaRPr lang="en-US" sz="1450" dirty="0"/>
           </a:p>
@@ -5338,7 +5597,7 @@
                 <a:ea typeface="Calibri" pitchFamily="34" charset="-122"/>
                 <a:cs typeface="Calibri" pitchFamily="34" charset="-120"/>
               </a:rPr>
-              <a:t>How did the first round go, from the posts offered to the teachers who actually started?</a:t>
+              <a:t>How have schools and retirees actually used the new rules since they came in?</a:t>
             </a:r>
             <a:endParaRPr lang="en-US" sz="1450" dirty="0"/>
           </a:p>
@@ -5362,7 +5621,7 @@
                 <a:ea typeface="Calibri" pitchFamily="34" charset="-122"/>
                 <a:cs typeface="Calibri" pitchFamily="34" charset="-120"/>
               </a:rPr>
-              <a:t>What do you know about why retired teachers turned the offer down, and what those who accepted were looking for?</a:t>
+              <a:t>Have you seen any unintended effects, on retirement decisions, on younger teachers or on the pension system?</a:t>
             </a:r>
             <a:endParaRPr lang="en-US" sz="1450" dirty="0"/>
           </a:p>
@@ -5386,7 +5645,7 @@
                 <a:ea typeface="Calibri" pitchFamily="34" charset="-122"/>
                 <a:cs typeface="Calibri" pitchFamily="34" charset="-120"/>
               </a:rPr>
-              <a:t>How has the measure been adjusted since, and what would make it work better?</a:t>
+              <a:t>What will decide whether the rules are kept when they expire, and what would you want to know before then?</a:t>
             </a:r>
             <a:endParaRPr lang="en-US" sz="1450" dirty="0"/>
           </a:p>
@@ -5394,7 +5653,7 @@
       </p:sp>
       <p:sp>
         <p:nvSpPr>
-          <p:cNvPr id="14" name="Text 11"/>
+          <p:cNvPr id="15" name="Text 12"/>
           <p:cNvSpPr txBox="1"/>
           <p:nvPr/>
         </p:nvSpPr>
@@ -5463,16 +5722,62 @@
           <a:chExt cx="0" cy="0"/>
         </a:xfrm>
       </p:grpSpPr>
-      <p:sp>
-        <p:nvSpPr>
-          <p:cNvPr id="2" name="Text 0"/>
-          <p:cNvSpPr txBox="1"/>
-          <p:nvPr/>
-        </p:nvSpPr>
-        <p:spPr>
-          <a:xfrm>
-            <a:off x="548640" y="457200"/>
-            <a:ext cx="10058400" cy="640080"/>
+      <p:pic>
+        <p:nvPicPr>
+          <p:cNvPr id="2" name="Image 0" descr="preencoded.png">    </p:cNvPr>
+          <p:cNvPicPr>
+            <a:picLocks noChangeAspect="1"/>
+          </p:cNvPicPr>
+          <p:nvPr/>
+        </p:nvPicPr>
+        <p:blipFill>
+          <a:blip r:embed="rId1"/>
+          <a:stretch>
+            <a:fillRect/>
+          </a:stretch>
+        </p:blipFill>
+        <p:spPr>
+          <a:xfrm>
+            <a:off x="548640" y="411480"/>
+            <a:ext cx="960120" cy="720090"/>
+          </a:xfrm>
+          <a:prstGeom prst="rect">
+            <a:avLst/>
+          </a:prstGeom>
+        </p:spPr>
+      </p:pic>
+      <p:sp>
+        <p:nvSpPr>
+          <p:cNvPr id="3" name="Shape 0"/>
+          <p:cNvSpPr/>
+          <p:nvPr/>
+        </p:nvSpPr>
+        <p:spPr>
+          <a:xfrm>
+            <a:off x="548640" y="411480"/>
+            <a:ext cx="960120" cy="720090"/>
+          </a:xfrm>
+          <a:prstGeom prst="rect">
+            <a:avLst/>
+          </a:prstGeom>
+          <a:ln w="9525">
+            <a:solidFill>
+              <a:srgbClr val="CFDCD5"/>
+            </a:solidFill>
+            <a:prstDash val="solid"/>
+          </a:ln>
+        </p:spPr>
+      </p:sp>
+      <p:sp>
+        <p:nvSpPr>
+          <p:cNvPr id="4" name="Text 1"/>
+          <p:cNvSpPr txBox="1"/>
+          <p:nvPr/>
+        </p:nvSpPr>
+        <p:spPr>
+          <a:xfrm>
+            <a:off x="1691640" y="365760"/>
+            <a:ext cx="5943600" cy="457200"/>
           </a:xfrm>
           <a:prstGeom prst="rect">
             <a:avLst/>
@@ -5488,7 +5793,151 @@
               <a:buNone/>
             </a:pPr>
             <a:r>
-              <a:rPr lang="en-US" sz="3000" b="1" dirty="0">
+              <a:rPr lang="en-US" sz="2200" b="1" dirty="0">
+                <a:solidFill>
+                  <a:srgbClr val="24313A"/>
+                </a:solidFill>
+                <a:latin typeface="Calibri" pitchFamily="34" charset="0"/>
+                <a:ea typeface="Calibri" pitchFamily="34" charset="-122"/>
+                <a:cs typeface="Calibri" pitchFamily="34" charset="-120"/>
+              </a:rPr>
+              <a:t>Portugal</a:t>
+            </a:r>
+            <a:endParaRPr lang="en-US" sz="2200" dirty="0"/>
+          </a:p>
+        </p:txBody>
+      </p:sp>
+      <p:sp>
+        <p:nvSpPr>
+          <p:cNvPr id="5" name="Shape 2"/>
+          <p:cNvSpPr/>
+          <p:nvPr/>
+        </p:nvSpPr>
+        <p:spPr>
+          <a:xfrm>
+            <a:off x="8165592" y="411480"/>
+            <a:ext cx="3474720" cy="429768"/>
+          </a:xfrm>
+          <a:prstGeom prst="roundRect">
+            <a:avLst>
+              <a:gd name="adj" fmla="val 50000"/>
+            </a:avLst>
+          </a:prstGeom>
+          <a:solidFill>
+            <a:srgbClr val="EAF2EE"/>
+          </a:solidFill>
+          <a:ln w="12700">
+            <a:solidFill>
+              <a:srgbClr val="B3542E"/>
+            </a:solidFill>
+            <a:prstDash val="solid"/>
+          </a:ln>
+        </p:spPr>
+      </p:sp>
+      <p:sp>
+        <p:nvSpPr>
+          <p:cNvPr id="6" name="Text 3"/>
+          <p:cNvSpPr txBox="1"/>
+          <p:nvPr/>
+        </p:nvSpPr>
+        <p:spPr>
+          <a:xfrm>
+            <a:off x="8165592" y="411480"/>
+            <a:ext cx="3474720" cy="429768"/>
+          </a:xfrm>
+          <a:prstGeom prst="rect">
+            <a:avLst/>
+          </a:prstGeom>
+          <a:noFill/>
+          <a:ln/>
+        </p:spPr>
+        <p:txBody>
+          <a:bodyPr wrap="square" lIns="0" tIns="0" rIns="0" bIns="0" rtlCol="0" anchor="ctr"/>
+          <a:lstStyle/>
+          <a:p>
+            <a:pPr algn="ctr" indent="0" marL="0">
+              <a:buNone/>
+            </a:pPr>
+            <a:r>
+              <a:rPr lang="en-US" sz="1350" b="1" dirty="0">
+                <a:solidFill>
+                  <a:srgbClr val="B3542E"/>
+                </a:solidFill>
+                <a:latin typeface="Calibri" pitchFamily="34" charset="0"/>
+                <a:ea typeface="Calibri" pitchFamily="34" charset="-122"/>
+                <a:cs typeface="Calibri" pitchFamily="34" charset="-120"/>
+              </a:rPr>
+              <a:t>Financial incentives</a:t>
+            </a:r>
+            <a:endParaRPr lang="en-US" sz="1350" dirty="0"/>
+          </a:p>
+        </p:txBody>
+      </p:sp>
+      <p:sp>
+        <p:nvSpPr>
+          <p:cNvPr id="7" name="Text 4"/>
+          <p:cNvSpPr txBox="1"/>
+          <p:nvPr/>
+        </p:nvSpPr>
+        <p:spPr>
+          <a:xfrm>
+            <a:off x="7251192" y="877824"/>
+            <a:ext cx="4389120" cy="274320"/>
+          </a:xfrm>
+          <a:prstGeom prst="rect">
+            <a:avLst/>
+          </a:prstGeom>
+          <a:noFill/>
+          <a:ln/>
+        </p:spPr>
+        <p:txBody>
+          <a:bodyPr wrap="square" lIns="0" tIns="0" rIns="0" bIns="0" rtlCol="0" anchor="ctr"/>
+          <a:lstStyle/>
+          <a:p>
+            <a:pPr algn="r" indent="0" marL="0">
+              <a:buNone/>
+            </a:pPr>
+            <a:r>
+              <a:rPr lang="en-US" sz="1100" dirty="0">
+                <a:solidFill>
+                  <a:srgbClr val="24313A"/>
+                </a:solidFill>
+                <a:latin typeface="Calibri" pitchFamily="34" charset="0"/>
+                <a:ea typeface="Calibri" pitchFamily="34" charset="-122"/>
+                <a:cs typeface="Calibri" pitchFamily="34" charset="-120"/>
+              </a:rPr>
+              <a:t>Target: Retired</a:t>
+            </a:r>
+            <a:endParaRPr lang="en-US" sz="1100" dirty="0"/>
+          </a:p>
+        </p:txBody>
+      </p:sp>
+      <p:sp>
+        <p:nvSpPr>
+          <p:cNvPr id="8" name="Text 5"/>
+          <p:cNvSpPr txBox="1"/>
+          <p:nvPr/>
+        </p:nvSpPr>
+        <p:spPr>
+          <a:xfrm>
+            <a:off x="548640" y="1389888"/>
+            <a:ext cx="4846320" cy="960120"/>
+          </a:xfrm>
+          <a:prstGeom prst="rect">
+            <a:avLst/>
+          </a:prstGeom>
+          <a:noFill/>
+          <a:ln/>
+        </p:spPr>
+        <p:txBody>
+          <a:bodyPr wrap="square" lIns="0" tIns="0" rIns="0" bIns="0" rtlCol="0" anchor="t"/>
+          <a:lstStyle/>
+          <a:p>
+            <a:pPr indent="0" marL="0">
+              <a:buNone/>
+            </a:pPr>
+            <a:r>
+              <a:rPr lang="en-US" sz="1850" b="1" dirty="0">
                 <a:solidFill>
                   <a:srgbClr val="24313A"/>
                 </a:solidFill>
@@ -5496,26 +5945,121 @@
                 <a:ea typeface="Cambria" pitchFamily="34" charset="-122"/>
                 <a:cs typeface="Cambria" pitchFamily="34" charset="-120"/>
               </a:rPr>
-              <a:t>If one of them does not answer</a:t>
-            </a:r>
-            <a:endParaRPr lang="en-US" sz="3000" dirty="0"/>
-          </a:p>
-        </p:txBody>
-      </p:sp>
-      <p:sp>
-        <p:nvSpPr>
-          <p:cNvPr id="3" name="Shape 1"/>
+              <a:t>Decree-Law 51/2024: retired teachers in shortage posts (2024/25)</a:t>
+            </a:r>
+            <a:endParaRPr lang="en-US" sz="1850" dirty="0"/>
+          </a:p>
+        </p:txBody>
+      </p:sp>
+      <p:sp>
+        <p:nvSpPr>
+          <p:cNvPr id="9" name="Text 6"/>
+          <p:cNvSpPr txBox="1"/>
+          <p:nvPr/>
+        </p:nvSpPr>
+        <p:spPr>
+          <a:xfrm>
+            <a:off x="548640" y="2432304"/>
+            <a:ext cx="4846320" cy="1874520"/>
+          </a:xfrm>
+          <a:prstGeom prst="rect">
+            <a:avLst/>
+          </a:prstGeom>
+          <a:noFill/>
+          <a:ln/>
+        </p:spPr>
+        <p:txBody>
+          <a:bodyPr wrap="square" lIns="0" tIns="0" rIns="0" bIns="0" rtlCol="0" anchor="t"/>
+          <a:lstStyle/>
+          <a:p>
+            <a:pPr indent="0" marL="0">
+              <a:lnSpc>
+                <a:spcPct val="106000"/>
+              </a:lnSpc>
+              <a:buNone/>
+            </a:pPr>
+            <a:r>
+              <a:rPr lang="en-US" sz="1400" dirty="0">
+                <a:solidFill>
+                  <a:srgbClr val="24313A"/>
+                </a:solidFill>
+                <a:latin typeface="Calibri" pitchFamily="34" charset="0"/>
+                <a:ea typeface="Calibri" pitchFamily="34" charset="-122"/>
+                <a:cs typeface="Calibri" pitchFamily="34" charset="-120"/>
+              </a:rPr>
+              <a:t>Schools with an unfilled post in a shortage subject, or officially classed as under-staffed, may sign a fixed-term contract with a teacher who retired five years ago or less. The school applies through an online form and the ministry authorises the contract within a yearly quota agreed with the finance ministry. Returners keep the full pension and receive an extra payment tied to the first step of the salary scale, in proportion to the hours they teach.</a:t>
+            </a:r>
+            <a:endParaRPr lang="en-US" sz="1400" dirty="0"/>
+          </a:p>
+        </p:txBody>
+      </p:sp>
+      <p:sp>
+        <p:nvSpPr>
+          <p:cNvPr id="10" name="Text 7"/>
+          <p:cNvSpPr txBox="1"/>
+          <p:nvPr/>
+        </p:nvSpPr>
+        <p:spPr>
+          <a:xfrm>
+            <a:off x="548640" y="4343400"/>
+            <a:ext cx="4846320" cy="1097280"/>
+          </a:xfrm>
+          <a:prstGeom prst="rect">
+            <a:avLst/>
+          </a:prstGeom>
+          <a:noFill/>
+          <a:ln/>
+        </p:spPr>
+        <p:txBody>
+          <a:bodyPr wrap="square" lIns="0" tIns="0" rIns="0" bIns="0" rtlCol="0" anchor="t"/>
+          <a:lstStyle/>
+          <a:p>
+            <a:pPr indent="0" marL="0">
+              <a:buNone/>
+            </a:pPr>
+            <a:r>
+              <a:rPr lang="en-US" sz="1250" b="1" dirty="0">
+                <a:solidFill>
+                  <a:srgbClr val="24313A"/>
+                </a:solidFill>
+                <a:latin typeface="Calibri" pitchFamily="34" charset="0"/>
+                <a:ea typeface="Calibri" pitchFamily="34" charset="-122"/>
+                <a:cs typeface="Calibri" pitchFamily="34" charset="-120"/>
+              </a:rPr>
+              <a:t>Whom to contact: </a:t>
+            </a:r>
+            <a:pPr indent="0" marL="0">
+              <a:buNone/>
+            </a:pPr>
+            <a:r>
+              <a:rPr lang="en-US" sz="1250" dirty="0">
+                <a:solidFill>
+                  <a:srgbClr val="24313A"/>
+                </a:solidFill>
+                <a:latin typeface="Calibri" pitchFamily="34" charset="0"/>
+                <a:ea typeface="Calibri" pitchFamily="34" charset="-122"/>
+                <a:cs typeface="Calibri" pitchFamily="34" charset="-120"/>
+              </a:rPr>
+              <a:t>Portuguese Ministry of Education, Directorate-General for School Administration, teacher recruitment.</a:t>
+            </a:r>
+            <a:endParaRPr lang="en-US" sz="1250" dirty="0"/>
+          </a:p>
+        </p:txBody>
+      </p:sp>
+      <p:sp>
+        <p:nvSpPr>
+          <p:cNvPr id="11" name="Shape 8"/>
           <p:cNvSpPr/>
           <p:nvPr/>
         </p:nvSpPr>
         <p:spPr>
           <a:xfrm>
-            <a:off x="548640" y="1234440"/>
-            <a:ext cx="11064240" cy="896112"/>
+            <a:off x="5760720" y="1417320"/>
+            <a:ext cx="5879592" cy="3429000"/>
           </a:xfrm>
           <a:prstGeom prst="roundRect">
             <a:avLst>
-              <a:gd name="adj" fmla="val 10204"/>
+              <a:gd name="adj" fmla="val 3200"/>
             </a:avLst>
           </a:prstGeom>
           <a:solidFill>
@@ -5531,14 +6075,14 @@
       </p:sp>
       <p:sp>
         <p:nvSpPr>
-          <p:cNvPr id="4" name="Text 2"/>
-          <p:cNvSpPr txBox="1"/>
-          <p:nvPr/>
-        </p:nvSpPr>
-        <p:spPr>
-          <a:xfrm>
-            <a:off x="777240" y="1307592"/>
-            <a:ext cx="10607040" cy="749808"/>
+          <p:cNvPr id="12" name="Text 9"/>
+          <p:cNvSpPr txBox="1"/>
+          <p:nvPr/>
+        </p:nvSpPr>
+        <p:spPr>
+          <a:xfrm>
+            <a:off x="6035040" y="1554480"/>
+            <a:ext cx="5394960" cy="411480"/>
           </a:xfrm>
           <a:prstGeom prst="rect">
             <a:avLst/>
@@ -5554,46 +6098,257 @@
               <a:buNone/>
             </a:pPr>
             <a:r>
-              <a:rPr lang="en-US" sz="1250" b="1" dirty="0">
-                <a:solidFill>
-                  <a:srgbClr val="24313A"/>
-                </a:solidFill>
-                <a:latin typeface="Calibri" pitchFamily="34" charset="0"/>
-                <a:ea typeface="Calibri" pitchFamily="34" charset="-122"/>
-                <a:cs typeface="Calibri" pitchFamily="34" charset="-120"/>
-              </a:rPr>
-              <a:t>Germany (Lower Saxony), earnings ceiling and letter to retiring teachers</a:t>
-            </a:r>
-            <a:endParaRPr lang="en-US" sz="1250" dirty="0"/>
-          </a:p>
+              <a:rPr lang="en-US" sz="1500" b="1" dirty="0">
+                <a:solidFill>
+                  <a:srgbClr val="B3542E"/>
+                </a:solidFill>
+                <a:latin typeface="Calibri" pitchFamily="34" charset="0"/>
+                <a:ea typeface="Calibri" pitchFamily="34" charset="-122"/>
+                <a:cs typeface="Calibri" pitchFamily="34" charset="-120"/>
+              </a:rPr>
+              <a:t>What we would like to know</a:t>
+            </a:r>
+            <a:endParaRPr lang="en-US" sz="1500" dirty="0"/>
+          </a:p>
+        </p:txBody>
+      </p:sp>
+      <p:sp>
+        <p:nvSpPr>
+          <p:cNvPr id="13" name="Text 10"/>
+          <p:cNvSpPr txBox="1"/>
+          <p:nvPr/>
+        </p:nvSpPr>
+        <p:spPr>
+          <a:xfrm>
+            <a:off x="6035040" y="2057400"/>
+            <a:ext cx="5349240" cy="4023360"/>
+          </a:xfrm>
+          <a:prstGeom prst="rect">
+            <a:avLst/>
+          </a:prstGeom>
+          <a:noFill/>
+          <a:ln/>
+        </p:spPr>
+        <p:txBody>
+          <a:bodyPr wrap="square" lIns="0" tIns="0" rIns="0" bIns="0" rtlCol="0" anchor="t"/>
+          <a:lstStyle/>
+          <a:p>
+            <a:pPr marL="177800" indent="-177800">
+              <a:lnSpc>
+                <a:spcPct val="104000"/>
+              </a:lnSpc>
+              <a:spcAft>
+                <a:spcPts val="1000"/>
+              </a:spcAft>
+              <a:buSzPct val="100000"/>
+              <a:buChar char="•"/>
+            </a:pPr>
+            <a:r>
+              <a:rPr lang="en-US" sz="1450" dirty="0">
+                <a:solidFill>
+                  <a:srgbClr val="24313A"/>
+                </a:solidFill>
+                <a:latin typeface="Calibri" pitchFamily="34" charset="0"/>
+                <a:ea typeface="Calibri" pitchFamily="34" charset="-122"/>
+                <a:cs typeface="Calibri" pitchFamily="34" charset="-120"/>
+              </a:rPr>
+              <a:t>What led the ministry to open these posts to retired teachers, and how was the quota agreed with the finance ministry?</a:t>
+            </a:r>
+            <a:endParaRPr lang="en-US" sz="1450" dirty="0"/>
+          </a:p>
+          <a:p>
+            <a:pPr marL="177800" indent="-177800">
+              <a:lnSpc>
+                <a:spcPct val="104000"/>
+              </a:lnSpc>
+              <a:spcAft>
+                <a:spcPts val="1000"/>
+              </a:spcAft>
+              <a:buSzPct val="100000"/>
+              <a:buChar char="•"/>
+            </a:pPr>
+            <a:r>
+              <a:rPr lang="en-US" sz="1450" dirty="0">
+                <a:solidFill>
+                  <a:srgbClr val="24313A"/>
+                </a:solidFill>
+                <a:latin typeface="Calibri" pitchFamily="34" charset="0"/>
+                <a:ea typeface="Calibri" pitchFamily="34" charset="-122"/>
+                <a:cs typeface="Calibri" pitchFamily="34" charset="-120"/>
+              </a:rPr>
+              <a:t>How did the first round go, from the posts offered to the teachers who actually started?</a:t>
+            </a:r>
+            <a:endParaRPr lang="en-US" sz="1450" dirty="0"/>
+          </a:p>
+          <a:p>
+            <a:pPr marL="177800" indent="-177800">
+              <a:lnSpc>
+                <a:spcPct val="104000"/>
+              </a:lnSpc>
+              <a:spcAft>
+                <a:spcPts val="1000"/>
+              </a:spcAft>
+              <a:buSzPct val="100000"/>
+              <a:buChar char="•"/>
+            </a:pPr>
+            <a:r>
+              <a:rPr lang="en-US" sz="1450" dirty="0">
+                <a:solidFill>
+                  <a:srgbClr val="24313A"/>
+                </a:solidFill>
+                <a:latin typeface="Calibri" pitchFamily="34" charset="0"/>
+                <a:ea typeface="Calibri" pitchFamily="34" charset="-122"/>
+                <a:cs typeface="Calibri" pitchFamily="34" charset="-120"/>
+              </a:rPr>
+              <a:t>What do you know about why retired teachers turned the offer down, and what those who accepted were looking for?</a:t>
+            </a:r>
+            <a:endParaRPr lang="en-US" sz="1450" dirty="0"/>
+          </a:p>
+          <a:p>
+            <a:pPr marL="177800" indent="-177800">
+              <a:lnSpc>
+                <a:spcPct val="104000"/>
+              </a:lnSpc>
+              <a:spcAft>
+                <a:spcPts val="1000"/>
+              </a:spcAft>
+              <a:buSzPct val="100000"/>
+              <a:buChar char="•"/>
+            </a:pPr>
+            <a:r>
+              <a:rPr lang="en-US" sz="1450" dirty="0">
+                <a:solidFill>
+                  <a:srgbClr val="24313A"/>
+                </a:solidFill>
+                <a:latin typeface="Calibri" pitchFamily="34" charset="0"/>
+                <a:ea typeface="Calibri" pitchFamily="34" charset="-122"/>
+                <a:cs typeface="Calibri" pitchFamily="34" charset="-120"/>
+              </a:rPr>
+              <a:t>How has the measure been adjusted since, and what would make it work better?</a:t>
+            </a:r>
+            <a:endParaRPr lang="en-US" sz="1450" dirty="0"/>
+          </a:p>
+        </p:txBody>
+      </p:sp>
+      <p:sp>
+        <p:nvSpPr>
+          <p:cNvPr id="14" name="Text 11"/>
+          <p:cNvSpPr txBox="1"/>
+          <p:nvPr/>
+        </p:nvSpPr>
+        <p:spPr>
+          <a:xfrm>
+            <a:off x="11185855" y="6473952"/>
+            <a:ext cx="548640" cy="274320"/>
+          </a:xfrm>
+          <a:prstGeom prst="rect">
+            <a:avLst/>
+          </a:prstGeom>
+          <a:noFill/>
+          <a:ln/>
+        </p:spPr>
+        <p:txBody>
+          <a:bodyPr wrap="square" lIns="0" tIns="0" rIns="0" bIns="0" rtlCol="0" anchor="ctr"/>
+          <a:lstStyle/>
+          <a:p>
+            <a:pPr algn="r" indent="0" marL="0">
+              <a:buNone/>
+            </a:pPr>
+            <a:r>
+              <a:rPr lang="en-US" sz="900" dirty="0">
+                <a:solidFill>
+                  <a:srgbClr val="24313A"/>
+                </a:solidFill>
+                <a:latin typeface="Calibri" pitchFamily="34" charset="0"/>
+                <a:ea typeface="Calibri" pitchFamily="34" charset="-122"/>
+                <a:cs typeface="Calibri" pitchFamily="34" charset="-120"/>
+              </a:rPr>
+              <a:t>8</a:t>
+            </a:r>
+            <a:endParaRPr lang="en-US" sz="900" dirty="0"/>
+          </a:p>
+        </p:txBody>
+      </p:sp>
+    </p:spTree>
+  </p:cSld>
+  <p:clrMapOvr>
+    <a:masterClrMapping/>
+  </p:clrMapOvr>
+</p:sld>
+</file>
+
+<file path=ppt/slides/slide9.xml><?xml version="1.0" encoding="utf-8"?>
+<p:sld xmlns:a="http://schemas.openxmlformats.org/drawingml/2006/main" xmlns:r="http://schemas.openxmlformats.org/officeDocument/2006/relationships" xmlns:p="http://schemas.openxmlformats.org/presentationml/2006/main">
+  <p:cSld name="Slide 9">
+    <p:bg>
+      <p:bgPr>
+        <a:solidFill>
+          <a:srgbClr val="FFFFFF"/>
+        </a:solidFill>
+      </p:bgPr>
+    </p:bg>
+    <p:spTree>
+      <p:nvGrpSpPr>
+        <p:cNvPr id="1" name=""/>
+        <p:cNvGrpSpPr/>
+        <p:nvPr/>
+      </p:nvGrpSpPr>
+      <p:grpSpPr>
+        <a:xfrm>
+          <a:off x="0" y="0"/>
+          <a:ext cx="0" cy="0"/>
+          <a:chOff x="0" y="0"/>
+          <a:chExt cx="0" cy="0"/>
+        </a:xfrm>
+      </p:grpSpPr>
+      <p:sp>
+        <p:nvSpPr>
+          <p:cNvPr id="2" name="Text 0"/>
+          <p:cNvSpPr txBox="1"/>
+          <p:nvPr/>
+        </p:nvSpPr>
+        <p:spPr>
+          <a:xfrm>
+            <a:off x="548640" y="457200"/>
+            <a:ext cx="10058400" cy="640080"/>
+          </a:xfrm>
+          <a:prstGeom prst="rect">
+            <a:avLst/>
+          </a:prstGeom>
+          <a:noFill/>
+          <a:ln/>
+        </p:spPr>
+        <p:txBody>
+          <a:bodyPr wrap="square" lIns="0" tIns="0" rIns="0" bIns="0" rtlCol="0" anchor="ctr"/>
+          <a:lstStyle/>
           <a:p>
             <a:pPr indent="0" marL="0">
               <a:buNone/>
             </a:pPr>
             <a:r>
-              <a:rPr lang="en-US" sz="1250" dirty="0">
-                <a:solidFill>
-                  <a:srgbClr val="24313A"/>
-                </a:solidFill>
-                <a:latin typeface="Calibri" pitchFamily="34" charset="0"/>
-                <a:ea typeface="Calibri" pitchFamily="34" charset="-122"/>
-                <a:cs typeface="Calibri" pitchFamily="34" charset="-120"/>
-              </a:rPr>
-              <a:t>A clean before-and-after: the ceiling was raised in 2022 and abolished in 2024, with a letter campaign in between. Pension records would show how many hours pensioners now teach.</a:t>
-            </a:r>
-            <a:endParaRPr lang="en-US" sz="1250" dirty="0"/>
-          </a:p>
-        </p:txBody>
-      </p:sp>
-      <p:sp>
-        <p:nvSpPr>
-          <p:cNvPr id="5" name="Shape 3"/>
+              <a:rPr lang="en-US" sz="3000" b="1" dirty="0">
+                <a:solidFill>
+                  <a:srgbClr val="24313A"/>
+                </a:solidFill>
+                <a:latin typeface="Cambria" pitchFamily="34" charset="0"/>
+                <a:ea typeface="Cambria" pitchFamily="34" charset="-122"/>
+                <a:cs typeface="Cambria" pitchFamily="34" charset="-120"/>
+              </a:rPr>
+              <a:t>If one of them does not answer</a:t>
+            </a:r>
+            <a:endParaRPr lang="en-US" sz="3000" dirty="0"/>
+          </a:p>
+        </p:txBody>
+      </p:sp>
+      <p:sp>
+        <p:nvSpPr>
+          <p:cNvPr id="3" name="Shape 1"/>
           <p:cNvSpPr/>
           <p:nvPr/>
         </p:nvSpPr>
         <p:spPr>
           <a:xfrm>
-            <a:off x="548640" y="2221992"/>
+            <a:off x="548640" y="1234440"/>
             <a:ext cx="11064240" cy="896112"/>
           </a:xfrm>
           <a:prstGeom prst="roundRect">
@@ -5614,13 +6369,13 @@
       </p:sp>
       <p:sp>
         <p:nvSpPr>
-          <p:cNvPr id="6" name="Text 4"/>
-          <p:cNvSpPr txBox="1"/>
-          <p:nvPr/>
-        </p:nvSpPr>
-        <p:spPr>
-          <a:xfrm>
-            <a:off x="777240" y="2295144"/>
+          <p:cNvPr id="4" name="Text 2"/>
+          <p:cNvSpPr txBox="1"/>
+          <p:nvPr/>
+        </p:nvSpPr>
+        <p:spPr>
+          <a:xfrm>
+            <a:off x="777240" y="1307592"/>
             <a:ext cx="10607040" cy="749808"/>
           </a:xfrm>
           <a:prstGeom prst="rect">
@@ -5645,7 +6400,7 @@
                 <a:ea typeface="Calibri" pitchFamily="34" charset="-122"/>
                 <a:cs typeface="Calibri" pitchFamily="34" charset="-120"/>
               </a:rPr>
-              <a:t>New Zealand, streamlined return with fees covered</a:t>
+              <a:t>Germany (Lower Saxony), earnings ceiling and letter to retiring teachers</a:t>
             </a:r>
             <a:endParaRPr lang="en-US" sz="1250" dirty="0"/>
           </a:p>
@@ -5662,7 +6417,7 @@
                 <a:ea typeface="Calibri" pitchFamily="34" charset="-122"/>
                 <a:cs typeface="Calibri" pitchFamily="34" charset="-120"/>
               </a:rPr>
-              <a:t>352 returners counted by April 2025; the Ministry monitors the pathway and could say who returns and whether they stay.</a:t>
+              <a:t>A clean before-and-after: the ceiling was raised in 2022 and abolished in 2024, with a letter campaign in between. Pension records would show how many hours pensioners now teach.</a:t>
             </a:r>
             <a:endParaRPr lang="en-US" sz="1250" dirty="0"/>
           </a:p>
@@ -5670,13 +6425,13 @@
       </p:sp>
       <p:sp>
         <p:nvSpPr>
-          <p:cNvPr id="7" name="Shape 5"/>
+          <p:cNvPr id="5" name="Shape 3"/>
           <p:cNvSpPr/>
           <p:nvPr/>
         </p:nvSpPr>
         <p:spPr>
           <a:xfrm>
-            <a:off x="548640" y="3209544"/>
+            <a:off x="548640" y="2221992"/>
             <a:ext cx="11064240" cy="896112"/>
           </a:xfrm>
           <a:prstGeom prst="roundRect">
@@ -5697,13 +6452,13 @@
       </p:sp>
       <p:sp>
         <p:nvSpPr>
-          <p:cNvPr id="8" name="Text 6"/>
-          <p:cNvSpPr txBox="1"/>
-          <p:nvPr/>
-        </p:nvSpPr>
-        <p:spPr>
-          <a:xfrm>
-            <a:off x="777240" y="3282696"/>
+          <p:cNvPr id="6" name="Text 4"/>
+          <p:cNvSpPr txBox="1"/>
+          <p:nvPr/>
+        </p:nvSpPr>
+        <p:spPr>
+          <a:xfrm>
+            <a:off x="777240" y="2295144"/>
             <a:ext cx="10607040" cy="749808"/>
           </a:xfrm>
           <a:prstGeom prst="rect">
@@ -5728,7 +6483,7 @@
                 <a:ea typeface="Calibri" pitchFamily="34" charset="-122"/>
                 <a:cs typeface="Calibri" pitchFamily="34" charset="-120"/>
               </a:rPr>
-              <a:t>United States (New Mexico), Educational Retirees Returning to Work Act (2022)</a:t>
+              <a:t>New Zealand, streamlined return with fees covered</a:t>
             </a:r>
             <a:endParaRPr lang="en-US" sz="1250" dirty="0"/>
           </a:p>
@@ -5745,7 +6500,7 @@
                 <a:ea typeface="Calibri" pitchFamily="34" charset="-122"/>
                 <a:cs typeface="Calibri" pitchFamily="34" charset="-120"/>
               </a:rPr>
-              <a:t>Every returning retiree must be approved by the Educational Retirement Board, so exact counts of applications, approvals and destinations exist; the three-year cap shows how long returners stay.</a:t>
+              <a:t>352 returners counted by April 2025; the Ministry monitors the pathway and could say who returns and whether they stay.</a:t>
             </a:r>
             <a:endParaRPr lang="en-US" sz="1250" dirty="0"/>
           </a:p>
@@ -5753,13 +6508,13 @@
       </p:sp>
       <p:sp>
         <p:nvSpPr>
-          <p:cNvPr id="9" name="Shape 7"/>
+          <p:cNvPr id="7" name="Shape 5"/>
           <p:cNvSpPr/>
           <p:nvPr/>
         </p:nvSpPr>
         <p:spPr>
           <a:xfrm>
-            <a:off x="548640" y="4197096"/>
+            <a:off x="548640" y="3209544"/>
             <a:ext cx="11064240" cy="896112"/>
           </a:xfrm>
           <a:prstGeom prst="roundRect">
@@ -5780,6 +6535,89 @@
       </p:sp>
       <p:sp>
         <p:nvSpPr>
+          <p:cNvPr id="8" name="Text 6"/>
+          <p:cNvSpPr txBox="1"/>
+          <p:nvPr/>
+        </p:nvSpPr>
+        <p:spPr>
+          <a:xfrm>
+            <a:off x="777240" y="3282696"/>
+            <a:ext cx="10607040" cy="749808"/>
+          </a:xfrm>
+          <a:prstGeom prst="rect">
+            <a:avLst/>
+          </a:prstGeom>
+          <a:noFill/>
+          <a:ln/>
+        </p:spPr>
+        <p:txBody>
+          <a:bodyPr wrap="square" lIns="0" tIns="0" rIns="0" bIns="0" rtlCol="0" anchor="ctr"/>
+          <a:lstStyle/>
+          <a:p>
+            <a:pPr indent="0" marL="0">
+              <a:buNone/>
+            </a:pPr>
+            <a:r>
+              <a:rPr lang="en-US" sz="1250" b="1" dirty="0">
+                <a:solidFill>
+                  <a:srgbClr val="24313A"/>
+                </a:solidFill>
+                <a:latin typeface="Calibri" pitchFamily="34" charset="0"/>
+                <a:ea typeface="Calibri" pitchFamily="34" charset="-122"/>
+                <a:cs typeface="Calibri" pitchFamily="34" charset="-120"/>
+              </a:rPr>
+              <a:t>United States (New Mexico), Educational Retirees Returning to Work Act (2022)</a:t>
+            </a:r>
+            <a:endParaRPr lang="en-US" sz="1250" dirty="0"/>
+          </a:p>
+          <a:p>
+            <a:pPr indent="0" marL="0">
+              <a:buNone/>
+            </a:pPr>
+            <a:r>
+              <a:rPr lang="en-US" sz="1250" dirty="0">
+                <a:solidFill>
+                  <a:srgbClr val="24313A"/>
+                </a:solidFill>
+                <a:latin typeface="Calibri" pitchFamily="34" charset="0"/>
+                <a:ea typeface="Calibri" pitchFamily="34" charset="-122"/>
+                <a:cs typeface="Calibri" pitchFamily="34" charset="-120"/>
+              </a:rPr>
+              <a:t>Every returning retiree must be approved by the Educational Retirement Board, so exact counts of applications, approvals and destinations exist; the three-year cap shows how long returners stay.</a:t>
+            </a:r>
+            <a:endParaRPr lang="en-US" sz="1250" dirty="0"/>
+          </a:p>
+        </p:txBody>
+      </p:sp>
+      <p:sp>
+        <p:nvSpPr>
+          <p:cNvPr id="9" name="Shape 7"/>
+          <p:cNvSpPr/>
+          <p:nvPr/>
+        </p:nvSpPr>
+        <p:spPr>
+          <a:xfrm>
+            <a:off x="548640" y="4197096"/>
+            <a:ext cx="11064240" cy="896112"/>
+          </a:xfrm>
+          <a:prstGeom prst="roundRect">
+            <a:avLst>
+              <a:gd name="adj" fmla="val 10204"/>
+            </a:avLst>
+          </a:prstGeom>
+          <a:solidFill>
+            <a:srgbClr val="EAF2EE"/>
+          </a:solidFill>
+          <a:ln w="12700">
+            <a:solidFill>
+              <a:srgbClr val="EAF2EE"/>
+            </a:solidFill>
+            <a:prstDash val="solid"/>
+          </a:ln>
+        </p:spPr>
+      </p:sp>
+      <p:sp>
+        <p:nvSpPr>
           <p:cNvPr id="10" name="Text 8"/>
           <p:cNvSpPr txBox="1"/>
           <p:nvPr/>
@@ -5867,7 +6705,7 @@
                 <a:ea typeface="Calibri" pitchFamily="34" charset="-122"/>
                 <a:cs typeface="Calibri" pitchFamily="34" charset="-120"/>
               </a:rPr>
-              <a:t>8</a:t>
+              <a:t>9</a:t>
             </a:r>
             <a:endParaRPr lang="en-US" sz="900" dirty="0"/>
           </a:p>
